--- a/src/Tests/Samples.PowerPointPresentation.DotNet10_0.verified.pptx
+++ b/src/Tests/Samples.PowerPointPresentation.DotNet10_0.verified.pptx
@@ -1504,12 +1504,10 @@
       <p:sp>
         <p:nvSpPr>
           <p:cNvPr id="2" name="TextBox 1"/>
-          <p:cNvSpPr>
-            <a:spLocks xmlns:a="http://schemas.openxmlformats.org/drawingml/2006/main" noGrp="1"/>
-          </p:cNvSpPr>
-          <p:nvPr>
-            <p:ph/>
-          </p:nvPr>
+          <p:cNvSpPr txBox="1">
+            <a:spLocks xmlns:a="http://schemas.openxmlformats.org/drawingml/2006/main" noGrp="1"/>
+          </p:cNvSpPr>
+          <p:nvPr/>
         </p:nvSpPr>
         <p:spPr>
           <a:xfrm xmlns:a="http://schemas.openxmlformats.org/drawingml/2006/main">
@@ -1558,12 +1556,10 @@
       <p:sp>
         <p:nvSpPr>
           <p:cNvPr id="2" name="TextBox 1"/>
-          <p:cNvSpPr>
-            <a:spLocks xmlns:a="http://schemas.openxmlformats.org/drawingml/2006/main" noGrp="1"/>
-          </p:cNvSpPr>
-          <p:nvPr>
-            <p:ph/>
-          </p:nvPr>
+          <p:cNvSpPr txBox="1">
+            <a:spLocks xmlns:a="http://schemas.openxmlformats.org/drawingml/2006/main" noGrp="1"/>
+          </p:cNvSpPr>
+          <p:nvPr/>
         </p:nvSpPr>
         <p:spPr>
           <a:xfrm xmlns:a="http://schemas.openxmlformats.org/drawingml/2006/main">
